--- a/assets/pptx/catalog-170.pptx
+++ b/assets/pptx/catalog-170.pptx
@@ -3371,7 +3371,7 @@
                 <a:ea typeface="Ebrima"/>
                 <a:cs typeface="Ebrima"/>
               </a:rPr>
-              <a:t>ለራስህ ክብር ወንበር አትውሰድ (2x)</a:t>
+              <a:t>ለራስህ ክብር ወንበር አትውሰድ 2x</a:t>
             </a:r>
           </a:p>
         </p:txBody>
@@ -3438,7 +3438,7 @@
                 <a:ea typeface="Ebrima"/>
                 <a:cs typeface="Ebrima"/>
               </a:rPr>
-              <a:t>ማንም ወንድሙን አይናቀው (2x)</a:t>
+              <a:t>ማንም ወንድሙን አይናቀው 2x</a:t>
             </a:r>
           </a:p>
           <a:p>
@@ -3456,7 +3456,7 @@
                 <a:ea typeface="Ebrima"/>
                 <a:cs typeface="Ebrima"/>
               </a:rPr>
-              <a:t>ያገኘም ያጣ ሰው ክቡር ነው (2x)</a:t>
+              <a:t>ያገኘም ያጣ ሰው ክቡር ነው 2x</a:t>
             </a:r>
           </a:p>
           <a:p>
@@ -3474,7 +3474,7 @@
                 <a:ea typeface="Ebrima"/>
                 <a:cs typeface="Ebrima"/>
               </a:rPr>
-              <a:t>ማንም ታናሹን አይናቀው (2x)</a:t>
+              <a:t>ማንም ታናሹን አይናቀው 2x</a:t>
             </a:r>
           </a:p>
           <a:p>
@@ -3492,7 +3492,7 @@
                 <a:ea typeface="Ebrima"/>
                 <a:cs typeface="Ebrima"/>
               </a:rPr>
-              <a:t>ያገኘም ያጣ ሰው ክቡር ነው (2x)</a:t>
+              <a:t>ያገኘም ያጣ ሰው ክቡር ነው 2x</a:t>
             </a:r>
           </a:p>
         </p:txBody>
@@ -3644,7 +3644,7 @@
                 <a:ea typeface="Ebrima"/>
                 <a:cs typeface="Ebrima"/>
               </a:rPr>
-              <a:t>ወንድሜ መገለሉ ይቅር (3x)</a:t>
+              <a:t>ወንድሜ መገለሉ ይቅር 3x</a:t>
             </a:r>
           </a:p>
         </p:txBody>
@@ -3953,7 +3953,7 @@
                 <a:ea typeface="Ebrima"/>
                 <a:cs typeface="Ebrima"/>
               </a:rPr>
-              <a:t>መጽናናቱ (ልሁንለት )</a:t>
+              <a:t>መጽናናቱ ልሁንለት </a:t>
             </a:r>
           </a:p>
           <a:p>
@@ -3971,7 +3971,7 @@
                 <a:ea typeface="Ebrima"/>
                 <a:cs typeface="Ebrima"/>
               </a:rPr>
-              <a:t>እኔ እያለሁ (ወንድሜ አይሙት)</a:t>
+              <a:t>እኔ እያለሁ ወንድሜ አይሙት</a:t>
             </a:r>
           </a:p>
           <a:p>
@@ -3989,7 +3989,7 @@
                 <a:ea typeface="Ebrima"/>
                 <a:cs typeface="Ebrima"/>
               </a:rPr>
-              <a:t>ትላንትና (እንዴት ይረሳል)</a:t>
+              <a:t>ትላንትና እንዴት ይረሳል</a:t>
             </a:r>
           </a:p>
           <a:p>
@@ -4007,7 +4007,7 @@
                 <a:ea typeface="Ebrima"/>
                 <a:cs typeface="Ebrima"/>
               </a:rPr>
-              <a:t>አፈር ባፈር (ላይ እንዴት ይኮራል)</a:t>
+              <a:t>አፈር ባፈር ላይ እንዴት ይኮራል</a:t>
             </a:r>
           </a:p>
         </p:txBody>
@@ -4195,7 +4195,7 @@
                 <a:ea typeface="Ebrima"/>
                 <a:cs typeface="Ebrima"/>
               </a:rPr>
-              <a:t>መፅናናቱ (ልሁንለት)</a:t>
+              <a:t>መፅናናቱ ልሁንለት</a:t>
             </a:r>
           </a:p>
           <a:p>
@@ -4213,7 +4213,7 @@
                 <a:ea typeface="Ebrima"/>
                 <a:cs typeface="Ebrima"/>
               </a:rPr>
-              <a:t>እኔ እያለሁ (ወንድሜ አይሙት)</a:t>
+              <a:t>እኔ እያለሁ ወንድሜ አይሙት</a:t>
             </a:r>
           </a:p>
           <a:p>
@@ -4231,7 +4231,7 @@
                 <a:ea typeface="Ebrima"/>
                 <a:cs typeface="Ebrima"/>
               </a:rPr>
-              <a:t>ትላንትና (እንዴት ይረሳል)</a:t>
+              <a:t>ትላንትና እንዴት ይረሳል</a:t>
             </a:r>
           </a:p>
           <a:p>
@@ -4249,7 +4249,7 @@
                 <a:ea typeface="Ebrima"/>
                 <a:cs typeface="Ebrima"/>
               </a:rPr>
-              <a:t>አፈር ባፈር (ላይ እንዴት ይኮራል)</a:t>
+              <a:t>አፈር ባፈር ላይ እንዴት ይኮራል</a:t>
             </a:r>
           </a:p>
         </p:txBody>
